--- a/Equip_28/Results/Analisis_PAP_and_ABL_RapidExpres_2026_04_05.pptx
+++ b/Equip_28/Results/Analisis_PAP_and_ABL_RapidExpres_2026_04_05.pptx
@@ -36193,7 +36193,7 @@
         <p:spPr>
           <a:xfrm>
             <a:off x="1560900" y="998885"/>
-            <a:ext cx="6022200" cy="554400"/>
+            <a:ext cx="6022200" cy="670505"/>
           </a:xfrm>
           <a:prstGeom prst="rect">
             <a:avLst/>
@@ -36222,7 +36222,7 @@
               <a:buNone/>
             </a:pPr>
             <a:r>
-              <a:rPr lang="en-US" sz="3601" b="1">
+              <a:rPr lang="en-US" sz="3601" b="1" dirty="0">
                 <a:solidFill>
                   <a:srgbClr val="004AAD"/>
                 </a:solidFill>
@@ -36231,9 +36231,9 @@
                 <a:cs typeface="Poppins"/>
                 <a:sym typeface="Poppins"/>
               </a:rPr>
-              <a:t>PREGUNTA R. 1</a:t>
+              <a:t>PREGUNTA 1</a:t>
             </a:r>
-            <a:endParaRPr/>
+            <a:endParaRPr dirty="0"/>
           </a:p>
         </p:txBody>
       </p:sp>
@@ -37107,7 +37107,7 @@
         <p:spPr>
           <a:xfrm>
             <a:off x="9675900" y="1400735"/>
-            <a:ext cx="6022200" cy="554400"/>
+            <a:ext cx="6022200" cy="670505"/>
           </a:xfrm>
           <a:prstGeom prst="rect">
             <a:avLst/>
@@ -37136,7 +37136,7 @@
               <a:buNone/>
             </a:pPr>
             <a:r>
-              <a:rPr lang="en-US" sz="3601" b="1">
+              <a:rPr lang="en-US" sz="3601" b="1" dirty="0">
                 <a:solidFill>
                   <a:srgbClr val="004AAD"/>
                 </a:solidFill>
@@ -37145,9 +37145,9 @@
                 <a:cs typeface="Poppins"/>
                 <a:sym typeface="Poppins"/>
               </a:rPr>
-              <a:t>PREGUNTA R. 2</a:t>
+              <a:t>PREGUNTA 2</a:t>
             </a:r>
-            <a:endParaRPr/>
+            <a:endParaRPr dirty="0"/>
           </a:p>
         </p:txBody>
       </p:sp>
@@ -37252,6 +37252,377 @@
               <a:t>Lorem ipsum dolr sit amet, consectetur adipiscing elit. Ut a enim nec nisl ullamcorper eleifend. Praesent risus leo, fringilla et nulla at, egestas euismod orci. Suspendisse porttitor diam eu condimentum aliquam. Fusce interdum cursus nisl ut rutrum. Donec et sapien sit amet nisl pretium efficitur. Morbi faucibus felis mauris, </a:t>
             </a:r>
             <a:endParaRPr/>
+          </a:p>
+        </p:txBody>
+      </p:sp>
+      <p:sp>
+        <p:nvSpPr>
+          <p:cNvPr id="11" name="Rectangle 10">
+            <a:extLst>
+              <a:ext uri="{FF2B5EF4-FFF2-40B4-BE49-F238E27FC236}">
+                <a16:creationId xmlns:a16="http://schemas.microsoft.com/office/drawing/2014/main" id="{7DEC304F-C054-4C1D-8DD1-37A4D57E9C7F}"/>
+              </a:ext>
+            </a:extLst>
+          </p:cNvPr>
+          <p:cNvSpPr/>
+          <p:nvPr/>
+        </p:nvSpPr>
+        <p:spPr>
+          <a:xfrm>
+            <a:off x="9185434" y="5348739"/>
+            <a:ext cx="3255100" cy="1106906"/>
+          </a:xfrm>
+          <a:prstGeom prst="rect">
+            <a:avLst/>
+          </a:prstGeom>
+          <a:solidFill>
+            <a:schemeClr val="bg1"/>
+          </a:solidFill>
+          <a:ln>
+            <a:solidFill>
+              <a:schemeClr val="bg2"/>
+            </a:solidFill>
+          </a:ln>
+        </p:spPr>
+        <p:style>
+          <a:lnRef idx="2">
+            <a:schemeClr val="accent1">
+              <a:shade val="50000"/>
+            </a:schemeClr>
+          </a:lnRef>
+          <a:fillRef idx="1">
+            <a:schemeClr val="accent1"/>
+          </a:fillRef>
+          <a:effectRef idx="0">
+            <a:schemeClr val="accent1"/>
+          </a:effectRef>
+          <a:fontRef idx="minor">
+            <a:schemeClr val="lt1"/>
+          </a:fontRef>
+        </p:style>
+        <p:txBody>
+          <a:bodyPr rtlCol="0" anchor="ctr"/>
+          <a:lstStyle/>
+          <a:p>
+            <a:pPr algn="ctr"/>
+            <a:r>
+              <a:rPr lang="es-ES" sz="2400" b="1" dirty="0">
+                <a:solidFill>
+                  <a:schemeClr val="bg2"/>
+                </a:solidFill>
+              </a:rPr>
+              <a:t>PERFIL ÓPTIMO</a:t>
+            </a:r>
+          </a:p>
+        </p:txBody>
+      </p:sp>
+      <p:sp>
+        <p:nvSpPr>
+          <p:cNvPr id="13" name="Rectangle 12">
+            <a:extLst>
+              <a:ext uri="{FF2B5EF4-FFF2-40B4-BE49-F238E27FC236}">
+                <a16:creationId xmlns:a16="http://schemas.microsoft.com/office/drawing/2014/main" id="{AE35B180-DB42-4672-A018-0CC9E45C6A7F}"/>
+              </a:ext>
+            </a:extLst>
+          </p:cNvPr>
+          <p:cNvSpPr/>
+          <p:nvPr/>
+        </p:nvSpPr>
+        <p:spPr>
+          <a:xfrm>
+            <a:off x="9176181" y="3254475"/>
+            <a:ext cx="3255100" cy="1106906"/>
+          </a:xfrm>
+          <a:prstGeom prst="rect">
+            <a:avLst/>
+          </a:prstGeom>
+          <a:solidFill>
+            <a:schemeClr val="bg1"/>
+          </a:solidFill>
+          <a:ln>
+            <a:solidFill>
+              <a:schemeClr val="bg2"/>
+            </a:solidFill>
+          </a:ln>
+        </p:spPr>
+        <p:style>
+          <a:lnRef idx="2">
+            <a:schemeClr val="accent1">
+              <a:shade val="50000"/>
+            </a:schemeClr>
+          </a:lnRef>
+          <a:fillRef idx="1">
+            <a:schemeClr val="accent1"/>
+          </a:fillRef>
+          <a:effectRef idx="0">
+            <a:schemeClr val="accent1"/>
+          </a:effectRef>
+          <a:fontRef idx="minor">
+            <a:schemeClr val="lt1"/>
+          </a:fontRef>
+        </p:style>
+        <p:txBody>
+          <a:bodyPr rtlCol="0" anchor="ctr"/>
+          <a:lstStyle/>
+          <a:p>
+            <a:pPr algn="ctr"/>
+            <a:r>
+              <a:rPr lang="es-ES" sz="2400" b="1" dirty="0">
+                <a:solidFill>
+                  <a:schemeClr val="bg2"/>
+                </a:solidFill>
+              </a:rPr>
+              <a:t>PERFIL CRÍTICO</a:t>
+            </a:r>
+          </a:p>
+        </p:txBody>
+      </p:sp>
+      <p:sp>
+        <p:nvSpPr>
+          <p:cNvPr id="14" name="Rectangle 13">
+            <a:extLst>
+              <a:ext uri="{FF2B5EF4-FFF2-40B4-BE49-F238E27FC236}">
+                <a16:creationId xmlns:a16="http://schemas.microsoft.com/office/drawing/2014/main" id="{2C599FCC-30BA-49EA-B8B7-EFC7481EF9DA}"/>
+              </a:ext>
+            </a:extLst>
+          </p:cNvPr>
+          <p:cNvSpPr/>
+          <p:nvPr/>
+        </p:nvSpPr>
+        <p:spPr>
+          <a:xfrm>
+            <a:off x="9144000" y="7310372"/>
+            <a:ext cx="3255100" cy="1106906"/>
+          </a:xfrm>
+          <a:prstGeom prst="rect">
+            <a:avLst/>
+          </a:prstGeom>
+          <a:solidFill>
+            <a:schemeClr val="bg1"/>
+          </a:solidFill>
+          <a:ln>
+            <a:solidFill>
+              <a:schemeClr val="bg2"/>
+            </a:solidFill>
+          </a:ln>
+        </p:spPr>
+        <p:style>
+          <a:lnRef idx="2">
+            <a:schemeClr val="accent1">
+              <a:shade val="50000"/>
+            </a:schemeClr>
+          </a:lnRef>
+          <a:fillRef idx="1">
+            <a:schemeClr val="accent1"/>
+          </a:fillRef>
+          <a:effectRef idx="0">
+            <a:schemeClr val="accent1"/>
+          </a:effectRef>
+          <a:fontRef idx="minor">
+            <a:schemeClr val="lt1"/>
+          </a:fontRef>
+        </p:style>
+        <p:txBody>
+          <a:bodyPr rtlCol="0" anchor="ctr"/>
+          <a:lstStyle/>
+          <a:p>
+            <a:pPr algn="ctr"/>
+            <a:r>
+              <a:rPr lang="es-ES" sz="2400" b="1" dirty="0">
+                <a:solidFill>
+                  <a:schemeClr val="bg2"/>
+                </a:solidFill>
+              </a:rPr>
+              <a:t>PERFIL SATURADO</a:t>
+            </a:r>
+          </a:p>
+        </p:txBody>
+      </p:sp>
+      <p:sp>
+        <p:nvSpPr>
+          <p:cNvPr id="15" name="Rectangle 14">
+            <a:extLst>
+              <a:ext uri="{FF2B5EF4-FFF2-40B4-BE49-F238E27FC236}">
+                <a16:creationId xmlns:a16="http://schemas.microsoft.com/office/drawing/2014/main" id="{333172FC-CAB4-46DA-ABCB-8C7C3DB5B330}"/>
+              </a:ext>
+            </a:extLst>
+          </p:cNvPr>
+          <p:cNvSpPr/>
+          <p:nvPr/>
+        </p:nvSpPr>
+        <p:spPr>
+          <a:xfrm>
+            <a:off x="12650378" y="3254475"/>
+            <a:ext cx="3255100" cy="1106906"/>
+          </a:xfrm>
+          <a:prstGeom prst="rect">
+            <a:avLst/>
+          </a:prstGeom>
+          <a:solidFill>
+            <a:schemeClr val="bg1"/>
+          </a:solidFill>
+          <a:ln>
+            <a:solidFill>
+              <a:schemeClr val="bg2"/>
+            </a:solidFill>
+          </a:ln>
+        </p:spPr>
+        <p:style>
+          <a:lnRef idx="2">
+            <a:schemeClr val="accent1">
+              <a:shade val="50000"/>
+            </a:schemeClr>
+          </a:lnRef>
+          <a:fillRef idx="1">
+            <a:schemeClr val="accent1"/>
+          </a:fillRef>
+          <a:effectRef idx="0">
+            <a:schemeClr val="accent1"/>
+          </a:effectRef>
+          <a:fontRef idx="minor">
+            <a:schemeClr val="lt1"/>
+          </a:fontRef>
+        </p:style>
+        <p:txBody>
+          <a:bodyPr rtlCol="0" anchor="ctr"/>
+          <a:lstStyle/>
+          <a:p>
+            <a:pPr algn="ctr"/>
+            <a:r>
+              <a:rPr lang="es-ES" sz="2400" b="1" dirty="0">
+                <a:solidFill>
+                  <a:schemeClr val="bg2"/>
+                </a:solidFill>
+              </a:rPr>
+              <a:t>DESEMPEÑO BAJO</a:t>
+            </a:r>
+          </a:p>
+        </p:txBody>
+      </p:sp>
+      <p:sp>
+        <p:nvSpPr>
+          <p:cNvPr id="16" name="Rectangle 15">
+            <a:extLst>
+              <a:ext uri="{FF2B5EF4-FFF2-40B4-BE49-F238E27FC236}">
+                <a16:creationId xmlns:a16="http://schemas.microsoft.com/office/drawing/2014/main" id="{F929C9C7-D33B-44C9-9E6D-D125CABD2080}"/>
+              </a:ext>
+            </a:extLst>
+          </p:cNvPr>
+          <p:cNvSpPr/>
+          <p:nvPr/>
+        </p:nvSpPr>
+        <p:spPr>
+          <a:xfrm>
+            <a:off x="12764093" y="5348739"/>
+            <a:ext cx="3255100" cy="1106906"/>
+          </a:xfrm>
+          <a:prstGeom prst="rect">
+            <a:avLst/>
+          </a:prstGeom>
+          <a:solidFill>
+            <a:schemeClr val="bg1"/>
+          </a:solidFill>
+          <a:ln>
+            <a:solidFill>
+              <a:schemeClr val="bg2"/>
+            </a:solidFill>
+          </a:ln>
+        </p:spPr>
+        <p:style>
+          <a:lnRef idx="2">
+            <a:schemeClr val="accent1">
+              <a:shade val="50000"/>
+            </a:schemeClr>
+          </a:lnRef>
+          <a:fillRef idx="1">
+            <a:schemeClr val="accent1"/>
+          </a:fillRef>
+          <a:effectRef idx="0">
+            <a:schemeClr val="accent1"/>
+          </a:effectRef>
+          <a:fontRef idx="minor">
+            <a:schemeClr val="lt1"/>
+          </a:fontRef>
+        </p:style>
+        <p:txBody>
+          <a:bodyPr rtlCol="0" anchor="ctr"/>
+          <a:lstStyle/>
+          <a:p>
+            <a:pPr algn="ctr"/>
+            <a:r>
+              <a:rPr lang="es-ES" sz="2400" b="1" dirty="0">
+                <a:solidFill>
+                  <a:schemeClr val="bg2"/>
+                </a:solidFill>
+              </a:rPr>
+              <a:t>DESEMPEÑO ALTO</a:t>
+            </a:r>
+          </a:p>
+        </p:txBody>
+      </p:sp>
+      <p:sp>
+        <p:nvSpPr>
+          <p:cNvPr id="17" name="Rectangle 16">
+            <a:extLst>
+              <a:ext uri="{FF2B5EF4-FFF2-40B4-BE49-F238E27FC236}">
+                <a16:creationId xmlns:a16="http://schemas.microsoft.com/office/drawing/2014/main" id="{1B9B3BC1-57B0-4601-BDEE-DAB122F66A1A}"/>
+              </a:ext>
+            </a:extLst>
+          </p:cNvPr>
+          <p:cNvSpPr/>
+          <p:nvPr/>
+        </p:nvSpPr>
+        <p:spPr>
+          <a:xfrm>
+            <a:off x="12764093" y="7293749"/>
+            <a:ext cx="3255100" cy="1106906"/>
+          </a:xfrm>
+          <a:prstGeom prst="rect">
+            <a:avLst/>
+          </a:prstGeom>
+          <a:solidFill>
+            <a:schemeClr val="bg1"/>
+          </a:solidFill>
+          <a:ln>
+            <a:solidFill>
+              <a:schemeClr val="bg2"/>
+            </a:solidFill>
+          </a:ln>
+        </p:spPr>
+        <p:style>
+          <a:lnRef idx="2">
+            <a:schemeClr val="accent1">
+              <a:shade val="50000"/>
+            </a:schemeClr>
+          </a:lnRef>
+          <a:fillRef idx="1">
+            <a:schemeClr val="accent1"/>
+          </a:fillRef>
+          <a:effectRef idx="0">
+            <a:schemeClr val="accent1"/>
+          </a:effectRef>
+          <a:fontRef idx="minor">
+            <a:schemeClr val="lt1"/>
+          </a:fontRef>
+        </p:style>
+        <p:txBody>
+          <a:bodyPr rtlCol="0" anchor="ctr"/>
+          <a:lstStyle/>
+          <a:p>
+            <a:pPr algn="ctr"/>
+            <a:r>
+              <a:rPr lang="es-ES" sz="2400" b="1">
+                <a:solidFill>
+                  <a:schemeClr val="bg2"/>
+                </a:solidFill>
+              </a:rPr>
+              <a:t>DESEMPEÑO MEDIO</a:t>
+            </a:r>
+            <a:endParaRPr lang="es-ES" sz="2400" b="1" dirty="0">
+              <a:solidFill>
+                <a:schemeClr val="bg2"/>
+              </a:solidFill>
+            </a:endParaRPr>
           </a:p>
         </p:txBody>
       </p:sp>
@@ -38142,7 +38513,7 @@
               <a:buNone/>
             </a:pPr>
             <a:r>
-              <a:rPr lang="en-US" sz="3601" b="1" i="0" u="none" strike="noStrike" cap="none">
+              <a:rPr lang="en-US" sz="3601" b="1" i="0" u="none" strike="noStrike" cap="none" dirty="0">
                 <a:solidFill>
                   <a:srgbClr val="004AAD"/>
                 </a:solidFill>
@@ -38153,7 +38524,7 @@
               </a:rPr>
               <a:t>TRES PUNTOS CLAVE</a:t>
             </a:r>
-            <a:endParaRPr/>
+            <a:endParaRPr dirty="0"/>
           </a:p>
         </p:txBody>
       </p:sp>

--- a/Equip_28/Results/Analisis_PAP_and_ABL_RapidExpres_2026_04_05.pptx
+++ b/Equip_28/Results/Analisis_PAP_and_ABL_RapidExpres_2026_04_05.pptx
@@ -19708,7 +19708,7 @@
               <a:buNone/>
             </a:pPr>
             <a:r>
-              <a:rPr lang="en-US" sz="3601" b="1">
+              <a:rPr lang="en-US" sz="3601" b="1" dirty="0">
                 <a:solidFill>
                   <a:srgbClr val="004AAD"/>
                 </a:solidFill>
@@ -19719,7 +19719,7 @@
               </a:rPr>
               <a:t>FACTORES POR NIVELES</a:t>
             </a:r>
-            <a:endParaRPr/>
+            <a:endParaRPr dirty="0"/>
           </a:p>
         </p:txBody>
       </p:sp>
@@ -20747,6 +20747,64 @@
           </a:ln>
         </p:spPr>
       </p:pic>
+      <p:sp>
+        <p:nvSpPr>
+          <p:cNvPr id="18" name="Google Shape;215;g3dbe1710380_1_117">
+            <a:extLst>
+              <a:ext uri="{FF2B5EF4-FFF2-40B4-BE49-F238E27FC236}">
+                <a16:creationId xmlns:a16="http://schemas.microsoft.com/office/drawing/2014/main" id="{7F0242F4-EE1D-4876-908A-7A7CEDF72209}"/>
+              </a:ext>
+            </a:extLst>
+          </p:cNvPr>
+          <p:cNvSpPr txBox="1"/>
+          <p:nvPr/>
+        </p:nvSpPr>
+        <p:spPr>
+          <a:xfrm>
+            <a:off x="2393073" y="779845"/>
+            <a:ext cx="7901400" cy="670505"/>
+          </a:xfrm>
+          <a:prstGeom prst="rect">
+            <a:avLst/>
+          </a:prstGeom>
+          <a:noFill/>
+          <a:ln>
+            <a:noFill/>
+          </a:ln>
+        </p:spPr>
+        <p:txBody>
+          <a:bodyPr spcFirstLastPara="1" wrap="square" lIns="0" tIns="0" rIns="0" bIns="0" anchor="t" anchorCtr="0">
+            <a:spAutoFit/>
+          </a:bodyPr>
+          <a:lstStyle/>
+          <a:p>
+            <a:pPr marL="0" marR="0" lvl="0" indent="0" algn="l" rtl="0">
+              <a:lnSpc>
+                <a:spcPct val="121055"/>
+              </a:lnSpc>
+              <a:spcBef>
+                <a:spcPts val="0"/>
+              </a:spcBef>
+              <a:spcAft>
+                <a:spcPts val="0"/>
+              </a:spcAft>
+              <a:buNone/>
+            </a:pPr>
+            <a:r>
+              <a:rPr lang="en-US" sz="3601" b="1" dirty="0">
+                <a:solidFill>
+                  <a:srgbClr val="004AAD"/>
+                </a:solidFill>
+                <a:latin typeface="Poppins"/>
+                <a:cs typeface="Poppins"/>
+                <a:sym typeface="Poppins"/>
+              </a:rPr>
+              <a:t>MODELO PREDICTIVO</a:t>
+            </a:r>
+            <a:endParaRPr dirty="0"/>
+          </a:p>
+        </p:txBody>
+      </p:sp>
     </p:spTree>
   </p:cSld>
   <p:clrMapOvr>
